--- a/static/guide/00_概要.pptx
+++ b/static/guide/00_概要.pptx
@@ -508,7 +508,7 @@
           <a:p>
             <a:r>
               <a:rPr lang="en-US" dirty="0"/>
-              <a:t>WG の立ち上げの全体像をまとめた資料です。細かい手順は 01〜03 の資料に分けてあります。</a:t>
+              <a:t>WG の立ち上げの全体像をまとめた資料です。細かい手順は 01〜03 の資料に分けてあり、04 でホームページ自体の作りを説明しています。</a:t>
             </a:r>
             <a:endParaRPr lang="en-US" dirty="0"/>
           </a:p>
@@ -772,7 +772,7 @@
           <a:p>
             <a:r>
               <a:rPr lang="en-US" dirty="0"/>
-              <a:t>リーダーはこの概要と 03 を、メンバーは 02 と 03 を読んでください。01 は運営向けですが、WG のリポジトリがどう守られているかを知りたい人も読めます。</a:t>
+              <a:t>リーダーはこの概要と 03 を、メンバーは 02 と 03 を読んでください。01 は運営向けですが、WG のリポジトリがどう守られているかを知りたい人も読めます。04 はホームページ自体の作りで、サブアプリを作るときの参考になります。</a:t>
             </a:r>
             <a:endParaRPr lang="en-US" dirty="0"/>
           </a:p>
@@ -1036,7 +1036,7 @@
           <a:p>
             <a:r>
               <a:rPr lang="en-US" dirty="0"/>
-              <a:t>手順の本体は homepage の docs/development.md と、wg-template の README です。資料と食い違ったときはそちらを正とします。</a:t>
+              <a:t>資料はすべて funitclub.org/guide/ に置いてあります。WG に参加したときの確認のメールと完了画面からも、このページへ案内します。手順の本体は homepage の docs/development.md と、wg-template の README です。資料と食い違ったときはそちらを正とします。</a:t>
             </a:r>
             <a:endParaRPr lang="en-US" dirty="0"/>
           </a:p>
@@ -1659,8 +1659,8 @@
         </p:nvSpPr>
         <p:spPr>
           <a:xfrm>
-            <a:off x="5394960" y="1051560"/>
-            <a:ext cx="3291840" cy="3017520"/>
+            <a:off x="5394960" y="868680"/>
+            <a:ext cx="3291840" cy="3520440"/>
           </a:xfrm>
           <a:prstGeom prst="rect">
             <a:avLst/>
@@ -1684,7 +1684,7 @@
         </p:nvSpPr>
         <p:spPr>
           <a:xfrm>
-            <a:off x="5623560" y="1207008"/>
+            <a:off x="5623560" y="1024128"/>
             <a:ext cx="2834640" cy="274320"/>
           </a:xfrm>
           <a:prstGeom prst="rect">
@@ -1709,7 +1709,7 @@
                 <a:ea typeface="Consolas" pitchFamily="34" charset="-122"/>
                 <a:cs typeface="Consolas" pitchFamily="34" charset="-120"/>
               </a:rPr>
-              <a:t>// 資料は 4 本</a:t>
+              <a:t>// 資料は 5 本</a:t>
             </a:r>
             <a:endParaRPr lang="en-US" sz="1000" dirty="0"/>
           </a:p>
@@ -1723,7 +1723,7 @@
         </p:nvSpPr>
         <p:spPr>
           <a:xfrm>
-            <a:off x="5486400" y="1545336"/>
+            <a:off x="5486400" y="1362456"/>
             <a:ext cx="3108960" cy="548640"/>
           </a:xfrm>
           <a:prstGeom prst="rect">
@@ -1748,7 +1748,7 @@
         </p:nvSpPr>
         <p:spPr>
           <a:xfrm>
-            <a:off x="5623560" y="1600200"/>
+            <a:off x="5623560" y="1417320"/>
             <a:ext cx="411480" cy="237744"/>
           </a:xfrm>
           <a:prstGeom prst="rect">
@@ -1787,7 +1787,7 @@
         </p:nvSpPr>
         <p:spPr>
           <a:xfrm>
-            <a:off x="6035040" y="1600200"/>
+            <a:off x="6035040" y="1417320"/>
             <a:ext cx="2514600" cy="237744"/>
           </a:xfrm>
           <a:prstGeom prst="rect">
@@ -1826,7 +1826,7 @@
         </p:nvSpPr>
         <p:spPr>
           <a:xfrm>
-            <a:off x="6035040" y="1847088"/>
+            <a:off x="6035040" y="1664208"/>
             <a:ext cx="2514600" cy="201168"/>
           </a:xfrm>
           <a:prstGeom prst="rect">
@@ -1865,7 +1865,7 @@
         </p:nvSpPr>
         <p:spPr>
           <a:xfrm>
-            <a:off x="5623560" y="2203704"/>
+            <a:off x="5623560" y="2020824"/>
             <a:ext cx="411480" cy="237744"/>
           </a:xfrm>
           <a:prstGeom prst="rect">
@@ -1904,7 +1904,7 @@
         </p:nvSpPr>
         <p:spPr>
           <a:xfrm>
-            <a:off x="6035040" y="2203704"/>
+            <a:off x="6035040" y="2020824"/>
             <a:ext cx="2514600" cy="237744"/>
           </a:xfrm>
           <a:prstGeom prst="rect">
@@ -1943,7 +1943,7 @@
         </p:nvSpPr>
         <p:spPr>
           <a:xfrm>
-            <a:off x="6035040" y="2450592"/>
+            <a:off x="6035040" y="2267712"/>
             <a:ext cx="2514600" cy="201168"/>
           </a:xfrm>
           <a:prstGeom prst="rect">
@@ -1982,7 +1982,7 @@
         </p:nvSpPr>
         <p:spPr>
           <a:xfrm>
-            <a:off x="5623560" y="2807208"/>
+            <a:off x="5623560" y="2624328"/>
             <a:ext cx="411480" cy="237744"/>
           </a:xfrm>
           <a:prstGeom prst="rect">
@@ -2021,7 +2021,7 @@
         </p:nvSpPr>
         <p:spPr>
           <a:xfrm>
-            <a:off x="6035040" y="2807208"/>
+            <a:off x="6035040" y="2624328"/>
             <a:ext cx="2514600" cy="237744"/>
           </a:xfrm>
           <a:prstGeom prst="rect">
@@ -2060,7 +2060,7 @@
         </p:nvSpPr>
         <p:spPr>
           <a:xfrm>
-            <a:off x="6035040" y="3054096"/>
+            <a:off x="6035040" y="2871216"/>
             <a:ext cx="2514600" cy="201168"/>
           </a:xfrm>
           <a:prstGeom prst="rect">
@@ -2099,7 +2099,7 @@
         </p:nvSpPr>
         <p:spPr>
           <a:xfrm>
-            <a:off x="5623560" y="3410712"/>
+            <a:off x="5623560" y="3227832"/>
             <a:ext cx="411480" cy="237744"/>
           </a:xfrm>
           <a:prstGeom prst="rect">
@@ -2138,7 +2138,7 @@
         </p:nvSpPr>
         <p:spPr>
           <a:xfrm>
-            <a:off x="6035040" y="3410712"/>
+            <a:off x="6035040" y="3227832"/>
             <a:ext cx="2514600" cy="237744"/>
           </a:xfrm>
           <a:prstGeom prst="rect">
@@ -2177,7 +2177,7 @@
         </p:nvSpPr>
         <p:spPr>
           <a:xfrm>
-            <a:off x="6035040" y="3657600"/>
+            <a:off x="6035040" y="3474720"/>
             <a:ext cx="2514600" cy="201168"/>
           </a:xfrm>
           <a:prstGeom prst="rect">
@@ -2203,6 +2203,123 @@
                 <a:cs typeface="Meiryo" pitchFamily="34" charset="-120"/>
               </a:rPr>
               <a:t>全員・毎日</a:t>
+            </a:r>
+            <a:endParaRPr lang="en-US" sz="900" dirty="0"/>
+          </a:p>
+        </p:txBody>
+      </p:sp>
+      <p:sp>
+        <p:nvSpPr>
+          <p:cNvPr id="23" name="Text 21"/>
+          <p:cNvSpPr txBox="1"/>
+          <p:nvPr/>
+        </p:nvSpPr>
+        <p:spPr>
+          <a:xfrm>
+            <a:off x="5623560" y="3831336"/>
+            <a:ext cx="411480" cy="237744"/>
+          </a:xfrm>
+          <a:prstGeom prst="rect">
+            <a:avLst/>
+          </a:prstGeom>
+          <a:noFill/>
+          <a:ln/>
+        </p:spPr>
+        <p:txBody>
+          <a:bodyPr wrap="square" lIns="0" tIns="0" rIns="0" bIns="0" rtlCol="0" anchor="t"/>
+          <a:lstStyle/>
+          <a:p>
+            <a:pPr indent="0" marL="0">
+              <a:buNone/>
+            </a:pPr>
+            <a:r>
+              <a:rPr lang="en-US" sz="1300" b="1" dirty="0">
+                <a:solidFill>
+                  <a:srgbClr val="B9CAD9"/>
+                </a:solidFill>
+                <a:latin typeface="Consolas" pitchFamily="34" charset="0"/>
+                <a:ea typeface="Consolas" pitchFamily="34" charset="-122"/>
+                <a:cs typeface="Consolas" pitchFamily="34" charset="-120"/>
+              </a:rPr>
+              <a:t>04</a:t>
+            </a:r>
+            <a:endParaRPr lang="en-US" sz="1300" dirty="0"/>
+          </a:p>
+        </p:txBody>
+      </p:sp>
+      <p:sp>
+        <p:nvSpPr>
+          <p:cNvPr id="24" name="Text 22"/>
+          <p:cNvSpPr txBox="1"/>
+          <p:nvPr/>
+        </p:nvSpPr>
+        <p:spPr>
+          <a:xfrm>
+            <a:off x="6035040" y="3831336"/>
+            <a:ext cx="2514600" cy="237744"/>
+          </a:xfrm>
+          <a:prstGeom prst="rect">
+            <a:avLst/>
+          </a:prstGeom>
+          <a:noFill/>
+          <a:ln/>
+        </p:spPr>
+        <p:txBody>
+          <a:bodyPr wrap="square" lIns="0" tIns="0" rIns="0" bIns="0" rtlCol="0" anchor="t"/>
+          <a:lstStyle/>
+          <a:p>
+            <a:pPr indent="0" marL="0">
+              <a:buNone/>
+            </a:pPr>
+            <a:r>
+              <a:rPr lang="en-US" sz="1150" b="1" dirty="0">
+                <a:solidFill>
+                  <a:srgbClr val="B9CAD9"/>
+                </a:solidFill>
+                <a:latin typeface="Meiryo" pitchFamily="34" charset="0"/>
+                <a:ea typeface="Meiryo" pitchFamily="34" charset="-122"/>
+                <a:cs typeface="Meiryo" pitchFamily="34" charset="-120"/>
+              </a:rPr>
+              <a:t>アプリケーション構成</a:t>
+            </a:r>
+            <a:endParaRPr lang="en-US" sz="1150" dirty="0"/>
+          </a:p>
+        </p:txBody>
+      </p:sp>
+      <p:sp>
+        <p:nvSpPr>
+          <p:cNvPr id="25" name="Text 23"/>
+          <p:cNvSpPr txBox="1"/>
+          <p:nvPr/>
+        </p:nvSpPr>
+        <p:spPr>
+          <a:xfrm>
+            <a:off x="6035040" y="4078224"/>
+            <a:ext cx="2514600" cy="201168"/>
+          </a:xfrm>
+          <a:prstGeom prst="rect">
+            <a:avLst/>
+          </a:prstGeom>
+          <a:noFill/>
+          <a:ln/>
+        </p:spPr>
+        <p:txBody>
+          <a:bodyPr wrap="square" lIns="0" tIns="0" rIns="0" bIns="0" rtlCol="0" anchor="t"/>
+          <a:lstStyle/>
+          <a:p>
+            <a:pPr indent="0" marL="0">
+              <a:buNone/>
+            </a:pPr>
+            <a:r>
+              <a:rPr lang="en-US" sz="900" dirty="0">
+                <a:solidFill>
+                  <a:srgbClr val="B9CAD9"/>
+                </a:solidFill>
+                <a:latin typeface="Meiryo" pitchFamily="34" charset="0"/>
+                <a:ea typeface="Meiryo" pitchFamily="34" charset="-122"/>
+                <a:cs typeface="Meiryo" pitchFamily="34" charset="-120"/>
+              </a:rPr>
+              <a:t>全員</a:t>
             </a:r>
             <a:endParaRPr lang="en-US" sz="900" dirty="0"/>
           </a:p>
@@ -4326,7 +4443,7 @@
         <p:spPr>
           <a:xfrm>
             <a:off x="457200" y="1417320"/>
-            <a:ext cx="2624328" cy="3200400"/>
+            <a:ext cx="1933956" cy="3200400"/>
           </a:xfrm>
           <a:prstGeom prst="rect">
             <a:avLst/>
@@ -4357,24 +4474,24 @@
         </p:nvSpPr>
         <p:spPr>
           <a:xfrm>
-            <a:off x="685800" y="1600200"/>
-            <a:ext cx="914400" cy="411480"/>
-          </a:xfrm>
-          <a:prstGeom prst="rect">
-            <a:avLst/>
-          </a:prstGeom>
-          <a:noFill/>
-          <a:ln/>
-        </p:spPr>
-        <p:txBody>
-          <a:bodyPr wrap="square" lIns="0" tIns="0" rIns="0" bIns="0" rtlCol="0" anchor="t"/>
-          <a:lstStyle/>
-          <a:p>
-            <a:pPr indent="0" marL="0">
-              <a:buNone/>
-            </a:pPr>
-            <a:r>
-              <a:rPr lang="en-US" sz="2400" b="1" dirty="0">
+            <a:off x="658368" y="1581912"/>
+            <a:ext cx="914400" cy="384048"/>
+          </a:xfrm>
+          <a:prstGeom prst="rect">
+            <a:avLst/>
+          </a:prstGeom>
+          <a:noFill/>
+          <a:ln/>
+        </p:spPr>
+        <p:txBody>
+          <a:bodyPr wrap="square" lIns="0" tIns="0" rIns="0" bIns="0" rtlCol="0" anchor="t"/>
+          <a:lstStyle/>
+          <a:p>
+            <a:pPr indent="0" marL="0">
+              <a:buNone/>
+            </a:pPr>
+            <a:r>
+              <a:rPr lang="en-US" sz="2200" b="1" dirty="0">
                 <a:solidFill>
                   <a:srgbClr val="5BB8FF"/>
                 </a:solidFill>
@@ -4384,7 +4501,7 @@
               </a:rPr>
               <a:t>01</a:t>
             </a:r>
-            <a:endParaRPr lang="en-US" sz="2400" dirty="0"/>
+            <a:endParaRPr lang="en-US" sz="2200" dirty="0"/>
           </a:p>
         </p:txBody>
       </p:sp>
@@ -4396,24 +4513,27 @@
         </p:nvSpPr>
         <p:spPr>
           <a:xfrm>
-            <a:off x="685800" y="2075688"/>
-            <a:ext cx="2212848" cy="329184"/>
-          </a:xfrm>
-          <a:prstGeom prst="rect">
-            <a:avLst/>
-          </a:prstGeom>
-          <a:noFill/>
-          <a:ln/>
-        </p:spPr>
-        <p:txBody>
-          <a:bodyPr wrap="square" lIns="0" tIns="0" rIns="0" bIns="0" rtlCol="0" anchor="t"/>
-          <a:lstStyle/>
-          <a:p>
-            <a:pPr indent="0" marL="0">
-              <a:buNone/>
-            </a:pPr>
-            <a:r>
-              <a:rPr lang="en-US" sz="1400" b="1" dirty="0">
+            <a:off x="658368" y="2020824"/>
+            <a:ext cx="1568196" cy="475488"/>
+          </a:xfrm>
+          <a:prstGeom prst="rect">
+            <a:avLst/>
+          </a:prstGeom>
+          <a:noFill/>
+          <a:ln/>
+        </p:spPr>
+        <p:txBody>
+          <a:bodyPr wrap="square" lIns="0" tIns="0" rIns="0" bIns="0" rtlCol="0" anchor="t"/>
+          <a:lstStyle/>
+          <a:p>
+            <a:pPr indent="0" marL="0">
+              <a:lnSpc>
+                <a:spcPct val="115000"/>
+              </a:lnSpc>
+              <a:buNone/>
+            </a:pPr>
+            <a:r>
+              <a:rPr lang="en-US" sz="1250" b="1" dirty="0">
                 <a:solidFill>
                   <a:srgbClr val="001E3C"/>
                 </a:solidFill>
@@ -4423,7 +4543,7 @@
               </a:rPr>
               <a:t>リポジトリの作り方と運用</a:t>
             </a:r>
-            <a:endParaRPr lang="en-US" sz="1400" dirty="0"/>
+            <a:endParaRPr lang="en-US" sz="1250" dirty="0"/>
           </a:p>
         </p:txBody>
       </p:sp>
@@ -4435,7 +4555,7 @@
         </p:nvSpPr>
         <p:spPr>
           <a:xfrm>
-            <a:off x="685800" y="2468880"/>
+            <a:off x="658368" y="2569464"/>
             <a:ext cx="566928" cy="237744"/>
           </a:xfrm>
           <a:prstGeom prst="roundRect">
@@ -4462,7 +4582,7 @@
         </p:nvSpPr>
         <p:spPr>
           <a:xfrm>
-            <a:off x="685800" y="2468880"/>
+            <a:off x="658368" y="2569464"/>
             <a:ext cx="566928" cy="237744"/>
           </a:xfrm>
           <a:prstGeom prst="rect">
@@ -4501,24 +4621,27 @@
         </p:nvSpPr>
         <p:spPr>
           <a:xfrm>
-            <a:off x="685800" y="2788920"/>
-            <a:ext cx="2212848" cy="274320"/>
-          </a:xfrm>
-          <a:prstGeom prst="rect">
-            <a:avLst/>
-          </a:prstGeom>
-          <a:noFill/>
-          <a:ln/>
-        </p:spPr>
-        <p:txBody>
-          <a:bodyPr wrap="square" lIns="0" tIns="0" rIns="0" bIns="0" rtlCol="0" anchor="t"/>
-          <a:lstStyle/>
-          <a:p>
-            <a:pPr indent="0" marL="0">
-              <a:buNone/>
-            </a:pPr>
-            <a:r>
-              <a:rPr lang="en-US" sz="950" dirty="0">
+            <a:off x="658368" y="2880360"/>
+            <a:ext cx="1568196" cy="365760"/>
+          </a:xfrm>
+          <a:prstGeom prst="rect">
+            <a:avLst/>
+          </a:prstGeom>
+          <a:noFill/>
+          <a:ln/>
+        </p:spPr>
+        <p:txBody>
+          <a:bodyPr wrap="square" lIns="0" tIns="0" rIns="0" bIns="0" rtlCol="0" anchor="t"/>
+          <a:lstStyle/>
+          <a:p>
+            <a:pPr indent="0" marL="0">
+              <a:lnSpc>
+                <a:spcPct val="115000"/>
+              </a:lnSpc>
+              <a:buNone/>
+            </a:pPr>
+            <a:r>
+              <a:rPr lang="en-US" sz="900" dirty="0">
                 <a:solidFill>
                   <a:srgbClr val="5A6B7B"/>
                 </a:solidFill>
@@ -4528,7 +4651,7 @@
               </a:rPr>
               <a:t>WG ができたとき・人が入れ替わるとき</a:t>
             </a:r>
-            <a:endParaRPr lang="en-US" sz="950" dirty="0"/>
+            <a:endParaRPr lang="en-US" sz="900" dirty="0"/>
           </a:p>
         </p:txBody>
       </p:sp>
@@ -4540,8 +4663,8 @@
         </p:nvSpPr>
         <p:spPr>
           <a:xfrm>
-            <a:off x="685800" y="3136392"/>
-            <a:ext cx="2167128" cy="0"/>
+            <a:off x="658368" y="3264408"/>
+            <a:ext cx="1531620" cy="0"/>
           </a:xfrm>
           <a:prstGeom prst="line">
             <a:avLst/>
@@ -4563,8 +4686,8 @@
         </p:nvSpPr>
         <p:spPr>
           <a:xfrm>
-            <a:off x="685800" y="3246120"/>
-            <a:ext cx="2212848" cy="1234440"/>
+            <a:off x="658368" y="3374136"/>
+            <a:ext cx="1568196" cy="1143000"/>
           </a:xfrm>
           <a:prstGeom prst="rect">
             <a:avLst/>
@@ -4584,7 +4707,7 @@
               <a:buChar char="•"/>
             </a:pPr>
             <a:r>
-              <a:rPr lang="en-US" sz="1050" dirty="0">
+              <a:rPr lang="en-US" sz="950" dirty="0">
                 <a:solidFill>
                   <a:srgbClr val="1B2B3A"/>
                 </a:solidFill>
@@ -4594,7 +4717,7 @@
               </a:rPr>
               <a:t>リポジトリとチームを作る</a:t>
             </a:r>
-            <a:endParaRPr lang="en-US" sz="1050" dirty="0"/>
+            <a:endParaRPr lang="en-US" sz="950" dirty="0"/>
           </a:p>
           <a:p>
             <a:pPr marL="342900" indent="-342900">
@@ -4605,7 +4728,7 @@
               <a:buChar char="•"/>
             </a:pPr>
             <a:r>
-              <a:rPr lang="en-US" sz="1050" dirty="0">
+              <a:rPr lang="en-US" sz="950" dirty="0">
                 <a:solidFill>
                   <a:srgbClr val="1B2B3A"/>
                 </a:solidFill>
@@ -4615,7 +4738,7 @@
               </a:rPr>
               <a:t>サイトへの登録</a:t>
             </a:r>
-            <a:endParaRPr lang="en-US" sz="1050" dirty="0"/>
+            <a:endParaRPr lang="en-US" sz="950" dirty="0"/>
           </a:p>
           <a:p>
             <a:pPr marL="342900" indent="-342900">
@@ -4626,7 +4749,7 @@
               <a:buChar char="•"/>
             </a:pPr>
             <a:r>
-              <a:rPr lang="en-US" sz="1050" dirty="0">
+              <a:rPr lang="en-US" sz="950" dirty="0">
                 <a:solidFill>
                   <a:srgbClr val="1B2B3A"/>
                 </a:solidFill>
@@ -4636,7 +4759,7 @@
               </a:rPr>
               <a:t>参加のしくみ</a:t>
             </a:r>
-            <a:endParaRPr lang="en-US" sz="1050" dirty="0"/>
+            <a:endParaRPr lang="en-US" sz="950" dirty="0"/>
           </a:p>
           <a:p>
             <a:pPr marL="342900" indent="-342900">
@@ -4647,7 +4770,7 @@
               <a:buChar char="•"/>
             </a:pPr>
             <a:r>
-              <a:rPr lang="en-US" sz="1050" dirty="0">
+              <a:rPr lang="en-US" sz="950" dirty="0">
                 <a:solidFill>
                   <a:srgbClr val="1B2B3A"/>
                 </a:solidFill>
@@ -4655,9 +4778,9 @@
                 <a:ea typeface="Meiryo" pitchFamily="34" charset="-122"/>
                 <a:cs typeface="Meiryo" pitchFamily="34" charset="-120"/>
               </a:rPr>
-              <a:t>交代と終了、公開の構成案</a:t>
-            </a:r>
-            <a:endParaRPr lang="en-US" sz="1050" dirty="0"/>
+              <a:t>交代と終了</a:t>
+            </a:r>
+            <a:endParaRPr lang="en-US" sz="950" dirty="0"/>
           </a:p>
         </p:txBody>
       </p:sp>
@@ -4669,8 +4792,8 @@
         </p:nvSpPr>
         <p:spPr>
           <a:xfrm>
-            <a:off x="3259836" y="1417320"/>
-            <a:ext cx="2624328" cy="3200400"/>
+            <a:off x="2555748" y="1417320"/>
+            <a:ext cx="1933956" cy="3200400"/>
           </a:xfrm>
           <a:prstGeom prst="rect">
             <a:avLst/>
@@ -4701,24 +4824,24 @@
         </p:nvSpPr>
         <p:spPr>
           <a:xfrm>
-            <a:off x="3488436" y="1600200"/>
-            <a:ext cx="914400" cy="411480"/>
-          </a:xfrm>
-          <a:prstGeom prst="rect">
-            <a:avLst/>
-          </a:prstGeom>
-          <a:noFill/>
-          <a:ln/>
-        </p:spPr>
-        <p:txBody>
-          <a:bodyPr wrap="square" lIns="0" tIns="0" rIns="0" bIns="0" rtlCol="0" anchor="t"/>
-          <a:lstStyle/>
-          <a:p>
-            <a:pPr indent="0" marL="0">
-              <a:buNone/>
-            </a:pPr>
-            <a:r>
-              <a:rPr lang="en-US" sz="2400" b="1" dirty="0">
+            <a:off x="2756916" y="1581912"/>
+            <a:ext cx="914400" cy="384048"/>
+          </a:xfrm>
+          <a:prstGeom prst="rect">
+            <a:avLst/>
+          </a:prstGeom>
+          <a:noFill/>
+          <a:ln/>
+        </p:spPr>
+        <p:txBody>
+          <a:bodyPr wrap="square" lIns="0" tIns="0" rIns="0" bIns="0" rtlCol="0" anchor="t"/>
+          <a:lstStyle/>
+          <a:p>
+            <a:pPr indent="0" marL="0">
+              <a:buNone/>
+            </a:pPr>
+            <a:r>
+              <a:rPr lang="en-US" sz="2200" b="1" dirty="0">
                 <a:solidFill>
                   <a:srgbClr val="5BB8FF"/>
                 </a:solidFill>
@@ -4728,7 +4851,7 @@
               </a:rPr>
               <a:t>02</a:t>
             </a:r>
-            <a:endParaRPr lang="en-US" sz="2400" dirty="0"/>
+            <a:endParaRPr lang="en-US" sz="2200" dirty="0"/>
           </a:p>
         </p:txBody>
       </p:sp>
@@ -4740,24 +4863,27 @@
         </p:nvSpPr>
         <p:spPr>
           <a:xfrm>
-            <a:off x="3488436" y="2075688"/>
-            <a:ext cx="2212848" cy="329184"/>
-          </a:xfrm>
-          <a:prstGeom prst="rect">
-            <a:avLst/>
-          </a:prstGeom>
-          <a:noFill/>
-          <a:ln/>
-        </p:spPr>
-        <p:txBody>
-          <a:bodyPr wrap="square" lIns="0" tIns="0" rIns="0" bIns="0" rtlCol="0" anchor="t"/>
-          <a:lstStyle/>
-          <a:p>
-            <a:pPr indent="0" marL="0">
-              <a:buNone/>
-            </a:pPr>
-            <a:r>
-              <a:rPr lang="en-US" sz="1400" b="1" dirty="0">
+            <a:off x="2756916" y="2020824"/>
+            <a:ext cx="1568196" cy="475488"/>
+          </a:xfrm>
+          <a:prstGeom prst="rect">
+            <a:avLst/>
+          </a:prstGeom>
+          <a:noFill/>
+          <a:ln/>
+        </p:spPr>
+        <p:txBody>
+          <a:bodyPr wrap="square" lIns="0" tIns="0" rIns="0" bIns="0" rtlCol="0" anchor="t"/>
+          <a:lstStyle/>
+          <a:p>
+            <a:pPr indent="0" marL="0">
+              <a:lnSpc>
+                <a:spcPct val="115000"/>
+              </a:lnSpc>
+              <a:buNone/>
+            </a:pPr>
+            <a:r>
+              <a:rPr lang="en-US" sz="1250" b="1" dirty="0">
                 <a:solidFill>
                   <a:srgbClr val="001E3C"/>
                 </a:solidFill>
@@ -4767,7 +4893,7 @@
               </a:rPr>
               <a:t>パソコンの準備</a:t>
             </a:r>
-            <a:endParaRPr lang="en-US" sz="1400" dirty="0"/>
+            <a:endParaRPr lang="en-US" sz="1250" dirty="0"/>
           </a:p>
         </p:txBody>
       </p:sp>
@@ -4779,7 +4905,7 @@
         </p:nvSpPr>
         <p:spPr>
           <a:xfrm>
-            <a:off x="3488436" y="2468880"/>
+            <a:off x="2756916" y="2569464"/>
             <a:ext cx="1005840" cy="237744"/>
           </a:xfrm>
           <a:prstGeom prst="roundRect">
@@ -4806,7 +4932,7 @@
         </p:nvSpPr>
         <p:spPr>
           <a:xfrm>
-            <a:off x="3488436" y="2468880"/>
+            <a:off x="2756916" y="2569464"/>
             <a:ext cx="1005840" cy="237744"/>
           </a:xfrm>
           <a:prstGeom prst="rect">
@@ -4845,24 +4971,27 @@
         </p:nvSpPr>
         <p:spPr>
           <a:xfrm>
-            <a:off x="3488436" y="2788920"/>
-            <a:ext cx="2212848" cy="274320"/>
-          </a:xfrm>
-          <a:prstGeom prst="rect">
-            <a:avLst/>
-          </a:prstGeom>
-          <a:noFill/>
-          <a:ln/>
-        </p:spPr>
-        <p:txBody>
-          <a:bodyPr wrap="square" lIns="0" tIns="0" rIns="0" bIns="0" rtlCol="0" anchor="t"/>
-          <a:lstStyle/>
-          <a:p>
-            <a:pPr indent="0" marL="0">
-              <a:buNone/>
-            </a:pPr>
-            <a:r>
-              <a:rPr lang="en-US" sz="950" dirty="0">
+            <a:off x="2756916" y="2880360"/>
+            <a:ext cx="1568196" cy="365760"/>
+          </a:xfrm>
+          <a:prstGeom prst="rect">
+            <a:avLst/>
+          </a:prstGeom>
+          <a:noFill/>
+          <a:ln/>
+        </p:spPr>
+        <p:txBody>
+          <a:bodyPr wrap="square" lIns="0" tIns="0" rIns="0" bIns="0" rtlCol="0" anchor="t"/>
+          <a:lstStyle/>
+          <a:p>
+            <a:pPr indent="0" marL="0">
+              <a:lnSpc>
+                <a:spcPct val="115000"/>
+              </a:lnSpc>
+              <a:buNone/>
+            </a:pPr>
+            <a:r>
+              <a:rPr lang="en-US" sz="900" dirty="0">
                 <a:solidFill>
                   <a:srgbClr val="5A6B7B"/>
                 </a:solidFill>
@@ -4872,7 +5001,7 @@
               </a:rPr>
               <a:t>参加したとき（初回だけ）</a:t>
             </a:r>
-            <a:endParaRPr lang="en-US" sz="950" dirty="0"/>
+            <a:endParaRPr lang="en-US" sz="900" dirty="0"/>
           </a:p>
         </p:txBody>
       </p:sp>
@@ -4884,8 +5013,8 @@
         </p:nvSpPr>
         <p:spPr>
           <a:xfrm>
-            <a:off x="3488436" y="3136392"/>
-            <a:ext cx="2167128" cy="0"/>
+            <a:off x="2756916" y="3264408"/>
+            <a:ext cx="1531620" cy="0"/>
           </a:xfrm>
           <a:prstGeom prst="line">
             <a:avLst/>
@@ -4907,8 +5036,8 @@
         </p:nvSpPr>
         <p:spPr>
           <a:xfrm>
-            <a:off x="3488436" y="3246120"/>
-            <a:ext cx="2212848" cy="1234440"/>
+            <a:off x="2756916" y="3374136"/>
+            <a:ext cx="1568196" cy="1143000"/>
           </a:xfrm>
           <a:prstGeom prst="rect">
             <a:avLst/>
@@ -4928,7 +5057,7 @@
               <a:buChar char="•"/>
             </a:pPr>
             <a:r>
-              <a:rPr lang="en-US" sz="1050" dirty="0">
+              <a:rPr lang="en-US" sz="950" dirty="0">
                 <a:solidFill>
                   <a:srgbClr val="1B2B3A"/>
                 </a:solidFill>
@@ -4938,7 +5067,7 @@
               </a:rPr>
               <a:t>サイトから WG に参加する</a:t>
             </a:r>
-            <a:endParaRPr lang="en-US" sz="1050" dirty="0"/>
+            <a:endParaRPr lang="en-US" sz="950" dirty="0"/>
           </a:p>
           <a:p>
             <a:pPr marL="342900" indent="-342900">
@@ -4949,7 +5078,7 @@
               <a:buChar char="•"/>
             </a:pPr>
             <a:r>
-              <a:rPr lang="en-US" sz="1050" dirty="0">
+              <a:rPr lang="en-US" sz="950" dirty="0">
                 <a:solidFill>
                   <a:srgbClr val="1B2B3A"/>
                 </a:solidFill>
@@ -4957,9 +5086,9 @@
                 <a:ea typeface="Meiryo" pitchFamily="34" charset="-122"/>
                 <a:cs typeface="Meiryo" pitchFamily="34" charset="-120"/>
               </a:rPr>
-              <a:t>パソコンに入れる 3 つのアプリ</a:t>
-            </a:r>
-            <a:endParaRPr lang="en-US" sz="1050" dirty="0"/>
+              <a:t>入れる 3 つのアプリ</a:t>
+            </a:r>
+            <a:endParaRPr lang="en-US" sz="950" dirty="0"/>
           </a:p>
           <a:p>
             <a:pPr marL="342900" indent="-342900">
@@ -4970,7 +5099,7 @@
               <a:buChar char="•"/>
             </a:pPr>
             <a:r>
-              <a:rPr lang="en-US" sz="1050" dirty="0">
+              <a:rPr lang="en-US" sz="950" dirty="0">
                 <a:solidFill>
                   <a:srgbClr val="1B2B3A"/>
                 </a:solidFill>
@@ -4980,7 +5109,7 @@
               </a:rPr>
               <a:t>インストールの手順</a:t>
             </a:r>
-            <a:endParaRPr lang="en-US" sz="1050" dirty="0"/>
+            <a:endParaRPr lang="en-US" sz="950" dirty="0"/>
           </a:p>
         </p:txBody>
       </p:sp>
@@ -4992,8 +5121,8 @@
         </p:nvSpPr>
         <p:spPr>
           <a:xfrm>
-            <a:off x="6062472" y="1417320"/>
-            <a:ext cx="2624328" cy="3200400"/>
+            <a:off x="4654296" y="1417320"/>
+            <a:ext cx="1933956" cy="3200400"/>
           </a:xfrm>
           <a:prstGeom prst="rect">
             <a:avLst/>
@@ -5024,24 +5153,24 @@
         </p:nvSpPr>
         <p:spPr>
           <a:xfrm>
-            <a:off x="6291072" y="1600200"/>
-            <a:ext cx="914400" cy="411480"/>
-          </a:xfrm>
-          <a:prstGeom prst="rect">
-            <a:avLst/>
-          </a:prstGeom>
-          <a:noFill/>
-          <a:ln/>
-        </p:spPr>
-        <p:txBody>
-          <a:bodyPr wrap="square" lIns="0" tIns="0" rIns="0" bIns="0" rtlCol="0" anchor="t"/>
-          <a:lstStyle/>
-          <a:p>
-            <a:pPr indent="0" marL="0">
-              <a:buNone/>
-            </a:pPr>
-            <a:r>
-              <a:rPr lang="en-US" sz="2400" b="1" dirty="0">
+            <a:off x="4855464" y="1581912"/>
+            <a:ext cx="914400" cy="384048"/>
+          </a:xfrm>
+          <a:prstGeom prst="rect">
+            <a:avLst/>
+          </a:prstGeom>
+          <a:noFill/>
+          <a:ln/>
+        </p:spPr>
+        <p:txBody>
+          <a:bodyPr wrap="square" lIns="0" tIns="0" rIns="0" bIns="0" rtlCol="0" anchor="t"/>
+          <a:lstStyle/>
+          <a:p>
+            <a:pPr indent="0" marL="0">
+              <a:buNone/>
+            </a:pPr>
+            <a:r>
+              <a:rPr lang="en-US" sz="2200" b="1" dirty="0">
                 <a:solidFill>
                   <a:srgbClr val="5BB8FF"/>
                 </a:solidFill>
@@ -5051,7 +5180,7 @@
               </a:rPr>
               <a:t>03</a:t>
             </a:r>
-            <a:endParaRPr lang="en-US" sz="2400" dirty="0"/>
+            <a:endParaRPr lang="en-US" sz="2200" dirty="0"/>
           </a:p>
         </p:txBody>
       </p:sp>
@@ -5063,24 +5192,27 @@
         </p:nvSpPr>
         <p:spPr>
           <a:xfrm>
-            <a:off x="6291072" y="2075688"/>
-            <a:ext cx="2212848" cy="329184"/>
-          </a:xfrm>
-          <a:prstGeom prst="rect">
-            <a:avLst/>
-          </a:prstGeom>
-          <a:noFill/>
-          <a:ln/>
-        </p:spPr>
-        <p:txBody>
-          <a:bodyPr wrap="square" lIns="0" tIns="0" rIns="0" bIns="0" rtlCol="0" anchor="t"/>
-          <a:lstStyle/>
-          <a:p>
-            <a:pPr indent="0" marL="0">
-              <a:buNone/>
-            </a:pPr>
-            <a:r>
-              <a:rPr lang="en-US" sz="1400" b="1" dirty="0">
+            <a:off x="4855464" y="2020824"/>
+            <a:ext cx="1568196" cy="475488"/>
+          </a:xfrm>
+          <a:prstGeom prst="rect">
+            <a:avLst/>
+          </a:prstGeom>
+          <a:noFill/>
+          <a:ln/>
+        </p:spPr>
+        <p:txBody>
+          <a:bodyPr wrap="square" lIns="0" tIns="0" rIns="0" bIns="0" rtlCol="0" anchor="t"/>
+          <a:lstStyle/>
+          <a:p>
+            <a:pPr indent="0" marL="0">
+              <a:lnSpc>
+                <a:spcPct val="115000"/>
+              </a:lnSpc>
+              <a:buNone/>
+            </a:pPr>
+            <a:r>
+              <a:rPr lang="en-US" sz="1250" b="1" dirty="0">
                 <a:solidFill>
                   <a:srgbClr val="001E3C"/>
                 </a:solidFill>
@@ -5090,7 +5222,7 @@
               </a:rPr>
               <a:t>開発の進め方</a:t>
             </a:r>
-            <a:endParaRPr lang="en-US" sz="1400" dirty="0"/>
+            <a:endParaRPr lang="en-US" sz="1250" dirty="0"/>
           </a:p>
         </p:txBody>
       </p:sp>
@@ -5102,7 +5234,7 @@
         </p:nvSpPr>
         <p:spPr>
           <a:xfrm>
-            <a:off x="6291072" y="2468880"/>
+            <a:off x="4855464" y="2569464"/>
             <a:ext cx="1005840" cy="237744"/>
           </a:xfrm>
           <a:prstGeom prst="roundRect">
@@ -5129,7 +5261,7 @@
         </p:nvSpPr>
         <p:spPr>
           <a:xfrm>
-            <a:off x="6291072" y="2468880"/>
+            <a:off x="4855464" y="2569464"/>
             <a:ext cx="1005840" cy="237744"/>
           </a:xfrm>
           <a:prstGeom prst="rect">
@@ -5168,24 +5300,27 @@
         </p:nvSpPr>
         <p:spPr>
           <a:xfrm>
-            <a:off x="6291072" y="2788920"/>
-            <a:ext cx="2212848" cy="274320"/>
-          </a:xfrm>
-          <a:prstGeom prst="rect">
-            <a:avLst/>
-          </a:prstGeom>
-          <a:noFill/>
-          <a:ln/>
-        </p:spPr>
-        <p:txBody>
-          <a:bodyPr wrap="square" lIns="0" tIns="0" rIns="0" bIns="0" rtlCol="0" anchor="t"/>
-          <a:lstStyle/>
-          <a:p>
-            <a:pPr indent="0" marL="0">
-              <a:buNone/>
-            </a:pPr>
-            <a:r>
-              <a:rPr lang="en-US" sz="950" dirty="0">
+            <a:off x="4855464" y="2880360"/>
+            <a:ext cx="1568196" cy="365760"/>
+          </a:xfrm>
+          <a:prstGeom prst="rect">
+            <a:avLst/>
+          </a:prstGeom>
+          <a:noFill/>
+          <a:ln/>
+        </p:spPr>
+        <p:txBody>
+          <a:bodyPr wrap="square" lIns="0" tIns="0" rIns="0" bIns="0" rtlCol="0" anchor="t"/>
+          <a:lstStyle/>
+          <a:p>
+            <a:pPr indent="0" marL="0">
+              <a:lnSpc>
+                <a:spcPct val="115000"/>
+              </a:lnSpc>
+              <a:buNone/>
+            </a:pPr>
+            <a:r>
+              <a:rPr lang="en-US" sz="900" dirty="0">
                 <a:solidFill>
                   <a:srgbClr val="5A6B7B"/>
                 </a:solidFill>
@@ -5195,7 +5330,7 @@
               </a:rPr>
               <a:t>毎日の作業</a:t>
             </a:r>
-            <a:endParaRPr lang="en-US" sz="950" dirty="0"/>
+            <a:endParaRPr lang="en-US" sz="900" dirty="0"/>
           </a:p>
         </p:txBody>
       </p:sp>
@@ -5207,8 +5342,8 @@
         </p:nvSpPr>
         <p:spPr>
           <a:xfrm>
-            <a:off x="6291072" y="3136392"/>
-            <a:ext cx="2167128" cy="0"/>
+            <a:off x="4855464" y="3264408"/>
+            <a:ext cx="1531620" cy="0"/>
           </a:xfrm>
           <a:prstGeom prst="line">
             <a:avLst/>
@@ -5230,8 +5365,8 @@
         </p:nvSpPr>
         <p:spPr>
           <a:xfrm>
-            <a:off x="6291072" y="3246120"/>
-            <a:ext cx="2212848" cy="1234440"/>
+            <a:off x="4855464" y="3374136"/>
+            <a:ext cx="1568196" cy="1143000"/>
           </a:xfrm>
           <a:prstGeom prst="rect">
             <a:avLst/>
@@ -5251,7 +5386,7 @@
               <a:buChar char="•"/>
             </a:pPr>
             <a:r>
-              <a:rPr lang="en-US" sz="1050" dirty="0">
+              <a:rPr lang="en-US" sz="950" dirty="0">
                 <a:solidFill>
                   <a:srgbClr val="1B2B3A"/>
                 </a:solidFill>
@@ -5261,7 +5396,7 @@
               </a:rPr>
               <a:t>始め方と終わり方</a:t>
             </a:r>
-            <a:endParaRPr lang="en-US" sz="1050" dirty="0"/>
+            <a:endParaRPr lang="en-US" sz="950" dirty="0"/>
           </a:p>
           <a:p>
             <a:pPr marL="342900" indent="-342900">
@@ -5272,7 +5407,7 @@
               <a:buChar char="•"/>
             </a:pPr>
             <a:r>
-              <a:rPr lang="en-US" sz="1050" dirty="0">
+              <a:rPr lang="en-US" sz="950" dirty="0">
                 <a:solidFill>
                   <a:srgbClr val="1B2B3A"/>
                 </a:solidFill>
@@ -5282,7 +5417,7 @@
               </a:rPr>
               <a:t>ブランチ → PR → マージ</a:t>
             </a:r>
-            <a:endParaRPr lang="en-US" sz="1050" dirty="0"/>
+            <a:endParaRPr lang="en-US" sz="950" dirty="0"/>
           </a:p>
           <a:p>
             <a:pPr marL="342900" indent="-342900">
@@ -5293,7 +5428,7 @@
               <a:buChar char="•"/>
             </a:pPr>
             <a:r>
-              <a:rPr lang="en-US" sz="1050" dirty="0">
+              <a:rPr lang="en-US" sz="950" dirty="0">
                 <a:solidFill>
                   <a:srgbClr val="1B2B3A"/>
                 </a:solidFill>
@@ -5303,8 +5438,274 @@
               </a:rPr>
               <a:t>レビューのしかた</a:t>
             </a:r>
-            <a:endParaRPr lang="en-US" sz="1050" dirty="0"/>
-          </a:p>
+            <a:endParaRPr lang="en-US" sz="950" dirty="0"/>
+          </a:p>
+        </p:txBody>
+      </p:sp>
+      <p:sp>
+        <p:nvSpPr>
+          <p:cNvPr id="28" name="Shape 26"/>
+          <p:cNvSpPr/>
+          <p:nvPr/>
+        </p:nvSpPr>
+        <p:spPr>
+          <a:xfrm>
+            <a:off x="6752844" y="1417320"/>
+            <a:ext cx="1933956" cy="3200400"/>
+          </a:xfrm>
+          <a:prstGeom prst="rect">
+            <a:avLst/>
+          </a:prstGeom>
+          <a:solidFill>
+            <a:srgbClr val="FFFFFF"/>
+          </a:solidFill>
+          <a:ln w="12700">
+            <a:solidFill>
+              <a:srgbClr val="FFFFFF"/>
+            </a:solidFill>
+            <a:prstDash val="solid"/>
+          </a:ln>
+          <a:effectLst>
+            <a:outerShdw sx="100000" sy="100000" kx="0" ky="0" algn="bl" rotWithShape="0" blurRad="76200" dist="25400" dir="5400000">
+              <a:srgbClr val="000000">
+                <a:alpha val="12000"/>
+              </a:srgbClr>
+            </a:outerShdw>
+          </a:effectLst>
+        </p:spPr>
+      </p:sp>
+      <p:sp>
+        <p:nvSpPr>
+          <p:cNvPr id="29" name="Text 27"/>
+          <p:cNvSpPr txBox="1"/>
+          <p:nvPr/>
+        </p:nvSpPr>
+        <p:spPr>
+          <a:xfrm>
+            <a:off x="6954012" y="1581912"/>
+            <a:ext cx="914400" cy="384048"/>
+          </a:xfrm>
+          <a:prstGeom prst="rect">
+            <a:avLst/>
+          </a:prstGeom>
+          <a:noFill/>
+          <a:ln/>
+        </p:spPr>
+        <p:txBody>
+          <a:bodyPr wrap="square" lIns="0" tIns="0" rIns="0" bIns="0" rtlCol="0" anchor="t"/>
+          <a:lstStyle/>
+          <a:p>
+            <a:pPr indent="0" marL="0">
+              <a:buNone/>
+            </a:pPr>
+            <a:r>
+              <a:rPr lang="en-US" sz="2200" b="1" dirty="0">
+                <a:solidFill>
+                  <a:srgbClr val="5BB8FF"/>
+                </a:solidFill>
+                <a:latin typeface="Consolas" pitchFamily="34" charset="0"/>
+                <a:ea typeface="Consolas" pitchFamily="34" charset="-122"/>
+                <a:cs typeface="Consolas" pitchFamily="34" charset="-120"/>
+              </a:rPr>
+              <a:t>04</a:t>
+            </a:r>
+            <a:endParaRPr lang="en-US" sz="2200" dirty="0"/>
+          </a:p>
+        </p:txBody>
+      </p:sp>
+      <p:sp>
+        <p:nvSpPr>
+          <p:cNvPr id="30" name="Text 28"/>
+          <p:cNvSpPr txBox="1"/>
+          <p:nvPr/>
+        </p:nvSpPr>
+        <p:spPr>
+          <a:xfrm>
+            <a:off x="6954012" y="2020824"/>
+            <a:ext cx="1568196" cy="475488"/>
+          </a:xfrm>
+          <a:prstGeom prst="rect">
+            <a:avLst/>
+          </a:prstGeom>
+          <a:noFill/>
+          <a:ln/>
+        </p:spPr>
+        <p:txBody>
+          <a:bodyPr wrap="square" lIns="0" tIns="0" rIns="0" bIns="0" rtlCol="0" anchor="t"/>
+          <a:lstStyle/>
+          <a:p>
+            <a:pPr indent="0" marL="0">
+              <a:lnSpc>
+                <a:spcPct val="115000"/>
+              </a:lnSpc>
+              <a:buNone/>
+            </a:pPr>
+            <a:r>
+              <a:rPr lang="en-US" sz="1250" b="1" dirty="0">
+                <a:solidFill>
+                  <a:srgbClr val="001E3C"/>
+                </a:solidFill>
+                <a:latin typeface="Meiryo" pitchFamily="34" charset="0"/>
+                <a:ea typeface="Meiryo" pitchFamily="34" charset="-122"/>
+                <a:cs typeface="Meiryo" pitchFamily="34" charset="-120"/>
+              </a:rPr>
+              <a:t>アプリケーション構成</a:t>
+            </a:r>
+            <a:endParaRPr lang="en-US" sz="1250" dirty="0"/>
+          </a:p>
+        </p:txBody>
+      </p:sp>
+      <p:sp>
+        <p:nvSpPr>
+          <p:cNvPr id="31" name="Shape 29"/>
+          <p:cNvSpPr/>
+          <p:nvPr/>
+        </p:nvSpPr>
+        <p:spPr>
+          <a:xfrm>
+            <a:off x="6954012" y="2569464"/>
+            <a:ext cx="1005840" cy="237744"/>
+          </a:xfrm>
+          <a:prstGeom prst="roundRect">
+            <a:avLst>
+              <a:gd name="adj" fmla="val 50000"/>
+            </a:avLst>
+          </a:prstGeom>
+          <a:solidFill>
+            <a:srgbClr val="5BB8FF"/>
+          </a:solidFill>
+          <a:ln w="12700">
+            <a:solidFill>
+              <a:srgbClr val="5BB8FF"/>
+            </a:solidFill>
+            <a:prstDash val="solid"/>
+          </a:ln>
+        </p:spPr>
+      </p:sp>
+      <p:sp>
+        <p:nvSpPr>
+          <p:cNvPr id="32" name="Text 30"/>
+          <p:cNvSpPr txBox="1"/>
+          <p:nvPr/>
+        </p:nvSpPr>
+        <p:spPr>
+          <a:xfrm>
+            <a:off x="6954012" y="2569464"/>
+            <a:ext cx="1005840" cy="237744"/>
+          </a:xfrm>
+          <a:prstGeom prst="rect">
+            <a:avLst/>
+          </a:prstGeom>
+          <a:noFill/>
+          <a:ln/>
+        </p:spPr>
+        <p:txBody>
+          <a:bodyPr wrap="square" lIns="0" tIns="0" rIns="0" bIns="0" rtlCol="0" anchor="ctr"/>
+          <a:lstStyle/>
+          <a:p>
+            <a:pPr algn="ctr" indent="0" marL="0">
+              <a:buNone/>
+            </a:pPr>
+            <a:r>
+              <a:rPr lang="en-US" sz="900" b="1" dirty="0">
+                <a:solidFill>
+                  <a:srgbClr val="001E3C"/>
+                </a:solidFill>
+                <a:latin typeface="Meiryo" pitchFamily="34" charset="0"/>
+                <a:ea typeface="Meiryo" pitchFamily="34" charset="-122"/>
+                <a:cs typeface="Meiryo" pitchFamily="34" charset="-120"/>
+              </a:rPr>
+              <a:t>メンバー全員</a:t>
+            </a:r>
+            <a:endParaRPr lang="en-US" sz="900" dirty="0"/>
+          </a:p>
+        </p:txBody>
+      </p:sp>
+      <p:sp>
+        <p:nvSpPr>
+          <p:cNvPr id="33" name="Text 31"/>
+          <p:cNvSpPr txBox="1"/>
+          <p:nvPr/>
+        </p:nvSpPr>
+        <p:spPr>
+          <a:xfrm>
+            <a:off x="6954012" y="2880360"/>
+            <a:ext cx="1568196" cy="365760"/>
+          </a:xfrm>
+          <a:prstGeom prst="rect">
+            <a:avLst/>
+          </a:prstGeom>
+          <a:noFill/>
+          <a:ln/>
+        </p:spPr>
+        <p:txBody>
+          <a:bodyPr wrap="square" lIns="0" tIns="0" rIns="0" bIns="0" rtlCol="0" anchor="t"/>
+          <a:lstStyle/>
+          <a:p>
+            <a:pPr indent="0" marL="0">
+              <a:lnSpc>
+                <a:spcPct val="115000"/>
+              </a:lnSpc>
+              <a:buNone/>
+            </a:pPr>
+            <a:r>
+              <a:rPr lang="en-US" sz="900" dirty="0">
+                <a:solidFill>
+                  <a:srgbClr val="5A6B7B"/>
+                </a:solidFill>
+                <a:latin typeface="Meiryo" pitchFamily="34" charset="0"/>
+                <a:ea typeface="Meiryo" pitchFamily="34" charset="-122"/>
+                <a:cs typeface="Meiryo" pitchFamily="34" charset="-120"/>
+              </a:rPr>
+              <a:t>サイトの中身を知りたいとき</a:t>
+            </a:r>
+            <a:endParaRPr lang="en-US" sz="900" dirty="0"/>
+          </a:p>
+        </p:txBody>
+      </p:sp>
+      <p:sp>
+        <p:nvSpPr>
+          <p:cNvPr id="34" name="Shape 32"/>
+          <p:cNvSpPr/>
+          <p:nvPr/>
+        </p:nvSpPr>
+        <p:spPr>
+          <a:xfrm>
+            <a:off x="6954012" y="3264408"/>
+            <a:ext cx="1531620" cy="0"/>
+          </a:xfrm>
+          <a:prstGeom prst="line">
+            <a:avLst/>
+          </a:prstGeom>
+          <a:noFill/>
+          <a:ln w="9525">
+            <a:solidFill>
+              <a:srgbClr val="DDDDDD"/>
+            </a:solidFill>
+            <a:prstDash val="solid"/>
+          </a:ln>
+        </p:spPr>
+      </p:sp>
+      <p:sp>
+        <p:nvSpPr>
+          <p:cNvPr id="35" name="Text 33"/>
+          <p:cNvSpPr txBox="1"/>
+          <p:nvPr/>
+        </p:nvSpPr>
+        <p:spPr>
+          <a:xfrm>
+            <a:off x="6954012" y="3374136"/>
+            <a:ext cx="1568196" cy="1143000"/>
+          </a:xfrm>
+          <a:prstGeom prst="rect">
+            <a:avLst/>
+          </a:prstGeom>
+          <a:noFill/>
+          <a:ln/>
+        </p:spPr>
+        <p:txBody>
+          <a:bodyPr wrap="square" lIns="0" tIns="0" rIns="0" bIns="0" rtlCol="0" anchor="t"/>
+          <a:lstStyle/>
           <a:p>
             <a:pPr marL="342900" indent="-342900">
               <a:spcAft>
@@ -5314,7 +5715,7 @@
               <a:buChar char="•"/>
             </a:pPr>
             <a:r>
-              <a:rPr lang="en-US" sz="1050" dirty="0">
+              <a:rPr lang="en-US" sz="950" dirty="0">
                 <a:solidFill>
                   <a:srgbClr val="1B2B3A"/>
                 </a:solidFill>
@@ -5322,9 +5723,51 @@
                 <a:ea typeface="Meiryo" pitchFamily="34" charset="-122"/>
                 <a:cs typeface="Meiryo" pitchFamily="34" charset="-120"/>
               </a:rPr>
-              <a:t>よく使う操作</a:t>
-            </a:r>
-            <a:endParaRPr lang="en-US" sz="1050" dirty="0"/>
+              <a:t>何がどこにあるか</a:t>
+            </a:r>
+            <a:endParaRPr lang="en-US" sz="950" dirty="0"/>
+          </a:p>
+          <a:p>
+            <a:pPr marL="342900" indent="-342900">
+              <a:spcAft>
+                <a:spcPts val="300"/>
+              </a:spcAft>
+              <a:buSzPct val="100000"/>
+              <a:buChar char="•"/>
+            </a:pPr>
+            <a:r>
+              <a:rPr lang="en-US" sz="950" dirty="0">
+                <a:solidFill>
+                  <a:srgbClr val="1B2B3A"/>
+                </a:solidFill>
+                <a:latin typeface="Meiryo" pitchFamily="34" charset="0"/>
+                <a:ea typeface="Meiryo" pitchFamily="34" charset="-122"/>
+                <a:cs typeface="Meiryo" pitchFamily="34" charset="-120"/>
+              </a:rPr>
+              <a:t>公開ページと編集画面</a:t>
+            </a:r>
+            <a:endParaRPr lang="en-US" sz="950" dirty="0"/>
+          </a:p>
+          <a:p>
+            <a:pPr marL="342900" indent="-342900">
+              <a:spcAft>
+                <a:spcPts val="300"/>
+              </a:spcAft>
+              <a:buSzPct val="100000"/>
+              <a:buChar char="•"/>
+            </a:pPr>
+            <a:r>
+              <a:rPr lang="en-US" sz="950" dirty="0">
+                <a:solidFill>
+                  <a:srgbClr val="1B2B3A"/>
+                </a:solidFill>
+                <a:latin typeface="Meiryo" pitchFamily="34" charset="0"/>
+                <a:ea typeface="Meiryo" pitchFamily="34" charset="-122"/>
+                <a:cs typeface="Meiryo" pitchFamily="34" charset="-120"/>
+              </a:rPr>
+              <a:t>成果が公表されるまで</a:t>
+            </a:r>
+            <a:endParaRPr lang="en-US" sz="950" dirty="0"/>
           </a:p>
         </p:txBody>
       </p:sp>
@@ -7057,7 +7500,7 @@
         <p:spPr>
           <a:xfrm>
             <a:off x="457200" y="1554480"/>
-            <a:ext cx="2624328" cy="1920240"/>
+            <a:ext cx="1933956" cy="1920240"/>
           </a:xfrm>
           <a:prstGeom prst="rect">
             <a:avLst/>
@@ -7081,7 +7524,7 @@
         </p:nvSpPr>
         <p:spPr>
           <a:xfrm>
-            <a:off x="731520" y="1828800"/>
+            <a:off x="713232" y="1828800"/>
             <a:ext cx="548640" cy="548640"/>
           </a:xfrm>
           <a:prstGeom prst="ellipse">
@@ -7114,7 +7557,7 @@
         </p:blipFill>
         <p:spPr>
           <a:xfrm>
-            <a:off x="874166" y="1971446"/>
+            <a:off x="855878" y="1971446"/>
             <a:ext cx="263347" cy="263347"/>
           </a:xfrm>
           <a:prstGeom prst="rect">
@@ -7130,24 +7573,24 @@
         </p:nvSpPr>
         <p:spPr>
           <a:xfrm>
-            <a:off x="731520" y="2514600"/>
-            <a:ext cx="2167128" cy="329184"/>
-          </a:xfrm>
-          <a:prstGeom prst="rect">
-            <a:avLst/>
-          </a:prstGeom>
-          <a:noFill/>
-          <a:ln/>
-        </p:spPr>
-        <p:txBody>
-          <a:bodyPr wrap="square" lIns="0" tIns="0" rIns="0" bIns="0" rtlCol="0" anchor="t"/>
-          <a:lstStyle/>
-          <a:p>
-            <a:pPr indent="0" marL="0">
-              <a:buNone/>
-            </a:pPr>
-            <a:r>
-              <a:rPr lang="en-US" sz="1500" b="1" dirty="0">
+            <a:off x="713232" y="2514600"/>
+            <a:ext cx="1522476" cy="329184"/>
+          </a:xfrm>
+          <a:prstGeom prst="rect">
+            <a:avLst/>
+          </a:prstGeom>
+          <a:noFill/>
+          <a:ln/>
+        </p:spPr>
+        <p:txBody>
+          <a:bodyPr wrap="square" lIns="0" tIns="0" rIns="0" bIns="0" rtlCol="0" anchor="t"/>
+          <a:lstStyle/>
+          <a:p>
+            <a:pPr indent="0" marL="0">
+              <a:buNone/>
+            </a:pPr>
+            <a:r>
+              <a:rPr lang="en-US" sz="1350" b="1" dirty="0">
                 <a:solidFill>
                   <a:srgbClr val="001E3C"/>
                 </a:solidFill>
@@ -7155,9 +7598,9 @@
                 <a:ea typeface="Meiryo" pitchFamily="34" charset="-122"/>
                 <a:cs typeface="Meiryo" pitchFamily="34" charset="-120"/>
               </a:rPr>
-              <a:t>開発環境と手順</a:t>
-            </a:r>
-            <a:endParaRPr lang="en-US" sz="1500" dirty="0"/>
+              <a:t>資料の置き場</a:t>
+            </a:r>
+            <a:endParaRPr lang="en-US" sz="1350" dirty="0"/>
           </a:p>
         </p:txBody>
       </p:sp>
@@ -7169,24 +7612,24 @@
         </p:nvSpPr>
         <p:spPr>
           <a:xfrm>
-            <a:off x="731520" y="2926080"/>
-            <a:ext cx="2258568" cy="274320"/>
-          </a:xfrm>
-          <a:prstGeom prst="rect">
-            <a:avLst/>
-          </a:prstGeom>
-          <a:noFill/>
-          <a:ln/>
-        </p:spPr>
-        <p:txBody>
-          <a:bodyPr wrap="square" lIns="0" tIns="0" rIns="0" bIns="0" rtlCol="0" anchor="t"/>
-          <a:lstStyle/>
-          <a:p>
-            <a:pPr indent="0" marL="0">
-              <a:buNone/>
-            </a:pPr>
-            <a:r>
-              <a:rPr lang="en-US" sz="1050" u="sng" dirty="0">
+            <a:off x="713232" y="2926080"/>
+            <a:ext cx="1586484" cy="274320"/>
+          </a:xfrm>
+          <a:prstGeom prst="rect">
+            <a:avLst/>
+          </a:prstGeom>
+          <a:noFill/>
+          <a:ln/>
+        </p:spPr>
+        <p:txBody>
+          <a:bodyPr wrap="square" lIns="0" tIns="0" rIns="0" bIns="0" rtlCol="0" anchor="t"/>
+          <a:lstStyle/>
+          <a:p>
+            <a:pPr indent="0" marL="0">
+              <a:buNone/>
+            </a:pPr>
+            <a:r>
+              <a:rPr lang="en-US" sz="950" u="sng" dirty="0">
                 <a:solidFill>
                   <a:srgbClr val="1A4A70"/>
                 </a:solidFill>
@@ -7201,9 +7644,9 @@
                   </a:extLst>
                 </a:hlinkClick>
               </a:rPr>
-              <a:t>docs/development.md</a:t>
-            </a:r>
-            <a:endParaRPr lang="en-US" sz="1050" dirty="0"/>
+              <a:t>funitclub.org/guide/</a:t>
+            </a:r>
+            <a:endParaRPr lang="en-US" sz="950" dirty="0"/>
           </a:p>
         </p:txBody>
       </p:sp>
@@ -7215,8 +7658,8 @@
         </p:nvSpPr>
         <p:spPr>
           <a:xfrm>
-            <a:off x="3259836" y="1554480"/>
-            <a:ext cx="2624328" cy="1920240"/>
+            <a:off x="2555748" y="1554480"/>
+            <a:ext cx="1933956" cy="1920240"/>
           </a:xfrm>
           <a:prstGeom prst="rect">
             <a:avLst/>
@@ -7240,7 +7683,7 @@
         </p:nvSpPr>
         <p:spPr>
           <a:xfrm>
-            <a:off x="3534156" y="1828800"/>
+            <a:off x="2811780" y="1828800"/>
             <a:ext cx="548640" cy="548640"/>
           </a:xfrm>
           <a:prstGeom prst="ellipse">
@@ -7273,7 +7716,7 @@
         </p:blipFill>
         <p:spPr>
           <a:xfrm>
-            <a:off x="3676802" y="1971446"/>
+            <a:off x="2954426" y="1971446"/>
             <a:ext cx="263347" cy="263347"/>
           </a:xfrm>
           <a:prstGeom prst="rect">
@@ -7289,24 +7732,24 @@
         </p:nvSpPr>
         <p:spPr>
           <a:xfrm>
-            <a:off x="3534156" y="2514600"/>
-            <a:ext cx="2167128" cy="329184"/>
-          </a:xfrm>
-          <a:prstGeom prst="rect">
-            <a:avLst/>
-          </a:prstGeom>
-          <a:noFill/>
-          <a:ln/>
-        </p:spPr>
-        <p:txBody>
-          <a:bodyPr wrap="square" lIns="0" tIns="0" rIns="0" bIns="0" rtlCol="0" anchor="t"/>
-          <a:lstStyle/>
-          <a:p>
-            <a:pPr indent="0" marL="0">
-              <a:buNone/>
-            </a:pPr>
-            <a:r>
-              <a:rPr lang="en-US" sz="1500" b="1" dirty="0">
+            <a:off x="2811780" y="2514600"/>
+            <a:ext cx="1522476" cy="329184"/>
+          </a:xfrm>
+          <a:prstGeom prst="rect">
+            <a:avLst/>
+          </a:prstGeom>
+          <a:noFill/>
+          <a:ln/>
+        </p:spPr>
+        <p:txBody>
+          <a:bodyPr wrap="square" lIns="0" tIns="0" rIns="0" bIns="0" rtlCol="0" anchor="t"/>
+          <a:lstStyle/>
+          <a:p>
+            <a:pPr indent="0" marL="0">
+              <a:buNone/>
+            </a:pPr>
+            <a:r>
+              <a:rPr lang="en-US" sz="1350" b="1" dirty="0">
                 <a:solidFill>
                   <a:srgbClr val="001E3C"/>
                 </a:solidFill>
@@ -7314,9 +7757,9 @@
                 <a:ea typeface="Meiryo" pitchFamily="34" charset="-122"/>
                 <a:cs typeface="Meiryo" pitchFamily="34" charset="-120"/>
               </a:rPr>
-              <a:t>WG テンプレート</a:t>
-            </a:r>
-            <a:endParaRPr lang="en-US" sz="1500" dirty="0"/>
+              <a:t>開発環境と手順</a:t>
+            </a:r>
+            <a:endParaRPr lang="en-US" sz="1350" dirty="0"/>
           </a:p>
         </p:txBody>
       </p:sp>
@@ -7328,24 +7771,24 @@
         </p:nvSpPr>
         <p:spPr>
           <a:xfrm>
-            <a:off x="3534156" y="2926080"/>
-            <a:ext cx="2258568" cy="274320"/>
-          </a:xfrm>
-          <a:prstGeom prst="rect">
-            <a:avLst/>
-          </a:prstGeom>
-          <a:noFill/>
-          <a:ln/>
-        </p:spPr>
-        <p:txBody>
-          <a:bodyPr wrap="square" lIns="0" tIns="0" rIns="0" bIns="0" rtlCol="0" anchor="t"/>
-          <a:lstStyle/>
-          <a:p>
-            <a:pPr indent="0" marL="0">
-              <a:buNone/>
-            </a:pPr>
-            <a:r>
-              <a:rPr lang="en-US" sz="1050" u="sng" dirty="0">
+            <a:off x="2811780" y="2926080"/>
+            <a:ext cx="1586484" cy="274320"/>
+          </a:xfrm>
+          <a:prstGeom prst="rect">
+            <a:avLst/>
+          </a:prstGeom>
+          <a:noFill/>
+          <a:ln/>
+        </p:spPr>
+        <p:txBody>
+          <a:bodyPr wrap="square" lIns="0" tIns="0" rIns="0" bIns="0" rtlCol="0" anchor="t"/>
+          <a:lstStyle/>
+          <a:p>
+            <a:pPr indent="0" marL="0">
+              <a:buNone/>
+            </a:pPr>
+            <a:r>
+              <a:rPr lang="en-US" sz="950" u="sng" dirty="0">
                 <a:solidFill>
                   <a:srgbClr val="1A4A70"/>
                 </a:solidFill>
@@ -7360,9 +7803,9 @@
                   </a:extLst>
                 </a:hlinkClick>
               </a:rPr>
-              <a:t>funITclub/wg-template</a:t>
-            </a:r>
-            <a:endParaRPr lang="en-US" sz="1050" dirty="0"/>
+              <a:t>docs/development.md</a:t>
+            </a:r>
+            <a:endParaRPr lang="en-US" sz="950" dirty="0"/>
           </a:p>
         </p:txBody>
       </p:sp>
@@ -7374,8 +7817,8 @@
         </p:nvSpPr>
         <p:spPr>
           <a:xfrm>
-            <a:off x="6062472" y="1554480"/>
-            <a:ext cx="2624328" cy="1920240"/>
+            <a:off x="4654296" y="1554480"/>
+            <a:ext cx="1933956" cy="1920240"/>
           </a:xfrm>
           <a:prstGeom prst="rect">
             <a:avLst/>
@@ -7399,7 +7842,7 @@
         </p:nvSpPr>
         <p:spPr>
           <a:xfrm>
-            <a:off x="6336792" y="1828800"/>
+            <a:off x="4910328" y="1828800"/>
             <a:ext cx="548640" cy="548640"/>
           </a:xfrm>
           <a:prstGeom prst="ellipse">
@@ -7432,7 +7875,7 @@
         </p:blipFill>
         <p:spPr>
           <a:xfrm>
-            <a:off x="6479438" y="1971446"/>
+            <a:off x="5052974" y="1971446"/>
             <a:ext cx="263347" cy="263347"/>
           </a:xfrm>
           <a:prstGeom prst="rect">
@@ -7448,24 +7891,24 @@
         </p:nvSpPr>
         <p:spPr>
           <a:xfrm>
-            <a:off x="6336792" y="2514600"/>
-            <a:ext cx="2167128" cy="329184"/>
-          </a:xfrm>
-          <a:prstGeom prst="rect">
-            <a:avLst/>
-          </a:prstGeom>
-          <a:noFill/>
-          <a:ln/>
-        </p:spPr>
-        <p:txBody>
-          <a:bodyPr wrap="square" lIns="0" tIns="0" rIns="0" bIns="0" rtlCol="0" anchor="t"/>
-          <a:lstStyle/>
-          <a:p>
-            <a:pPr indent="0" marL="0">
-              <a:buNone/>
-            </a:pPr>
-            <a:r>
-              <a:rPr lang="en-US" sz="1500" b="1" dirty="0">
+            <a:off x="4910328" y="2514600"/>
+            <a:ext cx="1522476" cy="329184"/>
+          </a:xfrm>
+          <a:prstGeom prst="rect">
+            <a:avLst/>
+          </a:prstGeom>
+          <a:noFill/>
+          <a:ln/>
+        </p:spPr>
+        <p:txBody>
+          <a:bodyPr wrap="square" lIns="0" tIns="0" rIns="0" bIns="0" rtlCol="0" anchor="t"/>
+          <a:lstStyle/>
+          <a:p>
+            <a:pPr indent="0" marL="0">
+              <a:buNone/>
+            </a:pPr>
+            <a:r>
+              <a:rPr lang="en-US" sz="1350" b="1" dirty="0">
                 <a:solidFill>
                   <a:srgbClr val="001E3C"/>
                 </a:solidFill>
@@ -7473,9 +7916,9 @@
                 <a:ea typeface="Meiryo" pitchFamily="34" charset="-122"/>
                 <a:cs typeface="Meiryo" pitchFamily="34" charset="-120"/>
               </a:rPr>
-              <a:t>運営への問い合わせ</a:t>
-            </a:r>
-            <a:endParaRPr lang="en-US" sz="1500" dirty="0"/>
+              <a:t>WG テンプレート</a:t>
+            </a:r>
+            <a:endParaRPr lang="en-US" sz="1350" dirty="0"/>
           </a:p>
         </p:txBody>
       </p:sp>
@@ -7487,24 +7930,24 @@
         </p:nvSpPr>
         <p:spPr>
           <a:xfrm>
-            <a:off x="6336792" y="2926080"/>
-            <a:ext cx="2258568" cy="274320"/>
-          </a:xfrm>
-          <a:prstGeom prst="rect">
-            <a:avLst/>
-          </a:prstGeom>
-          <a:noFill/>
-          <a:ln/>
-        </p:spPr>
-        <p:txBody>
-          <a:bodyPr wrap="square" lIns="0" tIns="0" rIns="0" bIns="0" rtlCol="0" anchor="t"/>
-          <a:lstStyle/>
-          <a:p>
-            <a:pPr indent="0" marL="0">
-              <a:buNone/>
-            </a:pPr>
-            <a:r>
-              <a:rPr lang="en-US" sz="1050" u="sng" dirty="0">
+            <a:off x="4910328" y="2926080"/>
+            <a:ext cx="1586484" cy="274320"/>
+          </a:xfrm>
+          <a:prstGeom prst="rect">
+            <a:avLst/>
+          </a:prstGeom>
+          <a:noFill/>
+          <a:ln/>
+        </p:spPr>
+        <p:txBody>
+          <a:bodyPr wrap="square" lIns="0" tIns="0" rIns="0" bIns="0" rtlCol="0" anchor="t"/>
+          <a:lstStyle/>
+          <a:p>
+            <a:pPr indent="0" marL="0">
+              <a:buNone/>
+            </a:pPr>
+            <a:r>
+              <a:rPr lang="en-US" sz="950" u="sng" dirty="0">
                 <a:solidFill>
                   <a:srgbClr val="1A4A70"/>
                 </a:solidFill>
@@ -7519,15 +7962,174 @@
                   </a:extLst>
                 </a:hlinkClick>
               </a:rPr>
+              <a:t>funITclub/wg-template</a:t>
+            </a:r>
+            <a:endParaRPr lang="en-US" sz="950" dirty="0"/>
+          </a:p>
+        </p:txBody>
+      </p:sp>
+      <p:sp>
+        <p:nvSpPr>
+          <p:cNvPr id="19" name="Shape 14"/>
+          <p:cNvSpPr/>
+          <p:nvPr/>
+        </p:nvSpPr>
+        <p:spPr>
+          <a:xfrm>
+            <a:off x="6752844" y="1554480"/>
+            <a:ext cx="1933956" cy="1920240"/>
+          </a:xfrm>
+          <a:prstGeom prst="rect">
+            <a:avLst/>
+          </a:prstGeom>
+          <a:solidFill>
+            <a:srgbClr val="FFFFFF"/>
+          </a:solidFill>
+          <a:ln w="12700">
+            <a:solidFill>
+              <a:srgbClr val="FFFFFF"/>
+            </a:solidFill>
+            <a:prstDash val="solid"/>
+          </a:ln>
+        </p:spPr>
+      </p:sp>
+      <p:sp>
+        <p:nvSpPr>
+          <p:cNvPr id="20" name="Shape 15"/>
+          <p:cNvSpPr/>
+          <p:nvPr/>
+        </p:nvSpPr>
+        <p:spPr>
+          <a:xfrm>
+            <a:off x="7008876" y="1828800"/>
+            <a:ext cx="548640" cy="548640"/>
+          </a:xfrm>
+          <a:prstGeom prst="ellipse">
+            <a:avLst/>
+          </a:prstGeom>
+          <a:solidFill>
+            <a:srgbClr val="5BB8FF"/>
+          </a:solidFill>
+          <a:ln w="12700">
+            <a:solidFill>
+              <a:srgbClr val="5BB8FF"/>
+            </a:solidFill>
+            <a:prstDash val="solid"/>
+          </a:ln>
+        </p:spPr>
+      </p:sp>
+      <p:pic>
+        <p:nvPicPr>
+          <p:cNvPr id="21" name="Image 3" descr="preencoded.png">    </p:cNvPr>
+          <p:cNvPicPr>
+            <a:picLocks noChangeAspect="1"/>
+          </p:cNvPicPr>
+          <p:nvPr/>
+        </p:nvPicPr>
+        <p:blipFill>
+          <a:blip r:embed="rId7"/>
+          <a:stretch>
+            <a:fillRect/>
+          </a:stretch>
+        </p:blipFill>
+        <p:spPr>
+          <a:xfrm>
+            <a:off x="7151522" y="1971446"/>
+            <a:ext cx="263347" cy="263347"/>
+          </a:xfrm>
+          <a:prstGeom prst="rect">
+            <a:avLst/>
+          </a:prstGeom>
+        </p:spPr>
+      </p:pic>
+      <p:sp>
+        <p:nvSpPr>
+          <p:cNvPr id="22" name="Text 16"/>
+          <p:cNvSpPr txBox="1"/>
+          <p:nvPr/>
+        </p:nvSpPr>
+        <p:spPr>
+          <a:xfrm>
+            <a:off x="7008876" y="2514600"/>
+            <a:ext cx="1522476" cy="329184"/>
+          </a:xfrm>
+          <a:prstGeom prst="rect">
+            <a:avLst/>
+          </a:prstGeom>
+          <a:noFill/>
+          <a:ln/>
+        </p:spPr>
+        <p:txBody>
+          <a:bodyPr wrap="square" lIns="0" tIns="0" rIns="0" bIns="0" rtlCol="0" anchor="t"/>
+          <a:lstStyle/>
+          <a:p>
+            <a:pPr indent="0" marL="0">
+              <a:buNone/>
+            </a:pPr>
+            <a:r>
+              <a:rPr lang="en-US" sz="1350" b="1" dirty="0">
+                <a:solidFill>
+                  <a:srgbClr val="001E3C"/>
+                </a:solidFill>
+                <a:latin typeface="Meiryo" pitchFamily="34" charset="0"/>
+                <a:ea typeface="Meiryo" pitchFamily="34" charset="-122"/>
+                <a:cs typeface="Meiryo" pitchFamily="34" charset="-120"/>
+              </a:rPr>
+              <a:t>運営への問い合わせ</a:t>
+            </a:r>
+            <a:endParaRPr lang="en-US" sz="1350" dirty="0"/>
+          </a:p>
+        </p:txBody>
+      </p:sp>
+      <p:sp>
+        <p:nvSpPr>
+          <p:cNvPr id="23" name="Text 17"/>
+          <p:cNvSpPr txBox="1"/>
+          <p:nvPr/>
+        </p:nvSpPr>
+        <p:spPr>
+          <a:xfrm>
+            <a:off x="7008876" y="2926080"/>
+            <a:ext cx="1586484" cy="274320"/>
+          </a:xfrm>
+          <a:prstGeom prst="rect">
+            <a:avLst/>
+          </a:prstGeom>
+          <a:noFill/>
+          <a:ln/>
+        </p:spPr>
+        <p:txBody>
+          <a:bodyPr wrap="square" lIns="0" tIns="0" rIns="0" bIns="0" rtlCol="0" anchor="t"/>
+          <a:lstStyle/>
+          <a:p>
+            <a:pPr indent="0" marL="0">
+              <a:buNone/>
+            </a:pPr>
+            <a:r>
+              <a:rPr lang="en-US" sz="950" u="sng" dirty="0">
+                <a:solidFill>
+                  <a:srgbClr val="1A4A70"/>
+                </a:solidFill>
+                <a:latin typeface="Consolas" pitchFamily="34" charset="0"/>
+                <a:ea typeface="Consolas" pitchFamily="34" charset="-122"/>
+                <a:cs typeface="Consolas" pitchFamily="34" charset="-120"/>
+                <a:hlinkClick r:id="rId8" invalidUrl="" action="" tgtFrame="" tooltip="" history="1" highlightClick="0" endSnd="0">
+                  <a:extLst>
+                    <a:ext uri="{A12FA001-AC4F-418D-AE19-62706E023703}">
+                      <ahyp:hlinkClr xmlns:ahyp="http://schemas.microsoft.com/office/drawing/2018/hyperlinkcolor" val="tx"/>
+                    </a:ext>
+                  </a:extLst>
+                </a:hlinkClick>
+              </a:rPr>
               <a:t>contact@funitclub.org</a:t>
             </a:r>
-            <a:endParaRPr lang="en-US" sz="1050" dirty="0"/>
-          </a:p>
-        </p:txBody>
-      </p:sp>
-      <p:sp>
-        <p:nvSpPr>
-          <p:cNvPr id="19" name="Text 14"/>
+            <a:endParaRPr lang="en-US" sz="950" dirty="0"/>
+          </a:p>
+        </p:txBody>
+      </p:sp>
+      <p:sp>
+        <p:nvSpPr>
+          <p:cNvPr id="24" name="Text 18"/>
           <p:cNvSpPr txBox="1"/>
           <p:nvPr/>
         </p:nvSpPr>

--- a/static/guide/00_概要.pptx
+++ b/static/guide/00_概要.pptx
@@ -3609,7 +3609,7 @@
                 <a:ea typeface="Meiryo" pitchFamily="34" charset="-122"/>
                 <a:cs typeface="Meiryo" pitchFamily="34" charset="-120"/>
               </a:rPr>
-              <a:t>ブランチ → PR → マージ。できたら「活動中」に</a:t>
+              <a:t>ブランチ → PR → マージで公開。URL を登録して「活動中」に</a:t>
             </a:r>
             <a:endParaRPr lang="en-US" sz="1100" dirty="0"/>
           </a:p>
@@ -4071,7 +4071,7 @@
                 <a:ea typeface="Meiryo" pitchFamily="34" charset="-122"/>
                 <a:cs typeface="Meiryo" pitchFamily="34" charset="-120"/>
               </a:rPr>
-              <a:t>アプリを動かす場所を用意する</a:t>
+              <a:t>WG のアプリを funitclub.org に載せる</a:t>
             </a:r>
             <a:endParaRPr lang="en-US" sz="1300" dirty="0"/>
           </a:p>
@@ -6982,7 +6982,7 @@
                 <a:ea typeface="Meiryo" pitchFamily="34" charset="-122"/>
                 <a:cs typeface="Meiryo" pitchFamily="34" charset="-120"/>
               </a:rPr>
-              <a:t>アプリができたら「活動中」に変え、URL を登録する。</a:t>
+              <a:t>main にマージすると自動で公開。URL を登録して「活動中」に。</a:t>
             </a:r>
             <a:endParaRPr lang="en-US" sz="1100" dirty="0"/>
           </a:p>

--- a/static/guide/00_概要.pptx
+++ b/static/guide/00_概要.pptx
@@ -2202,7 +2202,7 @@
                 <a:ea typeface="Meiryo" pitchFamily="34" charset="-122"/>
                 <a:cs typeface="Meiryo" pitchFamily="34" charset="-120"/>
               </a:rPr>
-              <a:t>全員・毎日</a:t>
+              <a:t>全員</a:t>
             </a:r>
             <a:endParaRPr lang="en-US" sz="900" dirty="0"/>
           </a:p>
@@ -5328,7 +5328,7 @@
                 <a:ea typeface="Meiryo" pitchFamily="34" charset="-122"/>
                 <a:cs typeface="Meiryo" pitchFamily="34" charset="-120"/>
               </a:rPr>
-              <a:t>毎日の作業</a:t>
+              <a:t>作業するとき</a:t>
             </a:r>
             <a:endParaRPr lang="en-US" sz="900" dirty="0"/>
           </a:p>

--- a/static/guide/00_概要.pptx
+++ b/static/guide/00_概要.pptx
@@ -3987,7 +3987,7 @@
                 <a:ea typeface="Meiryo" pitchFamily="34" charset="-122"/>
                 <a:cs typeface="Meiryo" pitchFamily="34" charset="-120"/>
               </a:rPr>
-              <a:t>リポジトリとチームを作る</a:t>
+              <a:t>リポジトリ・チーム・Chat を作る</a:t>
             </a:r>
             <a:endParaRPr lang="en-US" sz="1300" dirty="0"/>
           </a:p>
@@ -4029,7 +4029,7 @@
                 <a:ea typeface="Meiryo" pitchFamily="34" charset="-122"/>
                 <a:cs typeface="Meiryo" pitchFamily="34" charset="-120"/>
               </a:rPr>
-              <a:t>クラブの登録（Classroom）を管理する</a:t>
+              <a:t>失敗の通知が来たときだけ直す</a:t>
             </a:r>
             <a:endParaRPr lang="en-US" sz="1300" dirty="0"/>
           </a:p>
@@ -4050,7 +4050,7 @@
                 <a:ea typeface="Meiryo" pitchFamily="34" charset="-122"/>
                 <a:cs typeface="Meiryo" pitchFamily="34" charset="-120"/>
               </a:rPr>
-              <a:t>抜けた人をチームから外す</a:t>
+              <a:t>抜けた人をチームなどから外す</a:t>
             </a:r>
             <a:endParaRPr lang="en-US" sz="1300" dirty="0"/>
           </a:p>

--- a/static/guide/00_概要.pptx
+++ b/static/guide/00_概要.pptx
@@ -3609,7 +3609,7 @@
                 <a:ea typeface="Meiryo" pitchFamily="34" charset="-122"/>
                 <a:cs typeface="Meiryo" pitchFamily="34" charset="-120"/>
               </a:rPr>
-              <a:t>ブランチ → PR → マージで公開。URL を登録して「活動中」に</a:t>
+              <a:t>活動ページを載せ、アプリを作って公開。「活動中」に</a:t>
             </a:r>
             <a:endParaRPr lang="en-US" sz="1100" dirty="0"/>
           </a:p>
@@ -5415,7 +5415,7 @@
                 <a:ea typeface="Meiryo" pitchFamily="34" charset="-122"/>
                 <a:cs typeface="Meiryo" pitchFamily="34" charset="-120"/>
               </a:rPr>
-              <a:t>ブランチ → PR → マージ</a:t>
+              <a:t>ブランチ → PR → マージ・レビュー</a:t>
             </a:r>
             <a:endParaRPr lang="en-US" sz="950" dirty="0"/>
           </a:p>
@@ -5436,7 +5436,7 @@
                 <a:ea typeface="Meiryo" pitchFamily="34" charset="-122"/>
                 <a:cs typeface="Meiryo" pitchFamily="34" charset="-120"/>
               </a:rPr>
-              <a:t>レビューのしかた</a:t>
+              <a:t>活動ページの作り方</a:t>
             </a:r>
             <a:endParaRPr lang="en-US" sz="950" dirty="0"/>
           </a:p>
@@ -6982,7 +6982,7 @@
                 <a:ea typeface="Meiryo" pitchFamily="34" charset="-122"/>
                 <a:cs typeface="Meiryo" pitchFamily="34" charset="-120"/>
               </a:rPr>
-              <a:t>main にマージすると自動で公開。URL を登録して「活動中」に。</a:t>
+              <a:t>マージすると自動で公開。WG が URL を登録して「活動中」に。</a:t>
             </a:r>
             <a:endParaRPr lang="en-US" sz="1100" dirty="0"/>
           </a:p>
@@ -7375,7 +7375,7 @@
                 <a:ea typeface="Meiryo" pitchFamily="34" charset="-122"/>
                 <a:cs typeface="Meiryo" pitchFamily="34" charset="-120"/>
               </a:rPr>
-              <a:t>状態の切り替え・チーム・アーカイブは運営が行う（資料 01）。</a:t>
+              <a:t>掲載（URL・状態）は WG、チーム・アーカイブは運営（資料 01）。</a:t>
             </a:r>
             <a:endParaRPr lang="en-US" sz="1050" dirty="0"/>
           </a:p>
